--- a/docs/DocFlow Workflow.pptx
+++ b/docs/DocFlow Workflow.pptx
@@ -270,7 +270,7 @@
           <a:p>
             <a:fld id="{C6E6855C-4451-4D51-9C19-AA57B9F05DC3}" type="datetimeFigureOut">
               <a:rPr lang="en-GB" smtClean="0"/>
-              <a:t>15/06/2026</a:t>
+              <a:t>09/07/2026</a:t>
             </a:fld>
             <a:endParaRPr lang="en-GB"/>
           </a:p>
@@ -470,7 +470,7 @@
           <a:p>
             <a:fld id="{C6E6855C-4451-4D51-9C19-AA57B9F05DC3}" type="datetimeFigureOut">
               <a:rPr lang="en-GB" smtClean="0"/>
-              <a:t>15/06/2026</a:t>
+              <a:t>09/07/2026</a:t>
             </a:fld>
             <a:endParaRPr lang="en-GB"/>
           </a:p>
@@ -680,7 +680,7 @@
           <a:p>
             <a:fld id="{C6E6855C-4451-4D51-9C19-AA57B9F05DC3}" type="datetimeFigureOut">
               <a:rPr lang="en-GB" smtClean="0"/>
-              <a:t>15/06/2026</a:t>
+              <a:t>09/07/2026</a:t>
             </a:fld>
             <a:endParaRPr lang="en-GB"/>
           </a:p>
@@ -880,7 +880,7 @@
           <a:p>
             <a:fld id="{C6E6855C-4451-4D51-9C19-AA57B9F05DC3}" type="datetimeFigureOut">
               <a:rPr lang="en-GB" smtClean="0"/>
-              <a:t>15/06/2026</a:t>
+              <a:t>09/07/2026</a:t>
             </a:fld>
             <a:endParaRPr lang="en-GB"/>
           </a:p>
@@ -1156,7 +1156,7 @@
           <a:p>
             <a:fld id="{C6E6855C-4451-4D51-9C19-AA57B9F05DC3}" type="datetimeFigureOut">
               <a:rPr lang="en-GB" smtClean="0"/>
-              <a:t>15/06/2026</a:t>
+              <a:t>09/07/2026</a:t>
             </a:fld>
             <a:endParaRPr lang="en-GB"/>
           </a:p>
@@ -1424,7 +1424,7 @@
           <a:p>
             <a:fld id="{C6E6855C-4451-4D51-9C19-AA57B9F05DC3}" type="datetimeFigureOut">
               <a:rPr lang="en-GB" smtClean="0"/>
-              <a:t>15/06/2026</a:t>
+              <a:t>09/07/2026</a:t>
             </a:fld>
             <a:endParaRPr lang="en-GB"/>
           </a:p>
@@ -1839,7 +1839,7 @@
           <a:p>
             <a:fld id="{C6E6855C-4451-4D51-9C19-AA57B9F05DC3}" type="datetimeFigureOut">
               <a:rPr lang="en-GB" smtClean="0"/>
-              <a:t>15/06/2026</a:t>
+              <a:t>09/07/2026</a:t>
             </a:fld>
             <a:endParaRPr lang="en-GB"/>
           </a:p>
@@ -1981,7 +1981,7 @@
           <a:p>
             <a:fld id="{C6E6855C-4451-4D51-9C19-AA57B9F05DC3}" type="datetimeFigureOut">
               <a:rPr lang="en-GB" smtClean="0"/>
-              <a:t>15/06/2026</a:t>
+              <a:t>09/07/2026</a:t>
             </a:fld>
             <a:endParaRPr lang="en-GB"/>
           </a:p>
@@ -2094,7 +2094,7 @@
           <a:p>
             <a:fld id="{C6E6855C-4451-4D51-9C19-AA57B9F05DC3}" type="datetimeFigureOut">
               <a:rPr lang="en-GB" smtClean="0"/>
-              <a:t>15/06/2026</a:t>
+              <a:t>09/07/2026</a:t>
             </a:fld>
             <a:endParaRPr lang="en-GB"/>
           </a:p>
@@ -2407,7 +2407,7 @@
           <a:p>
             <a:fld id="{C6E6855C-4451-4D51-9C19-AA57B9F05DC3}" type="datetimeFigureOut">
               <a:rPr lang="en-GB" smtClean="0"/>
-              <a:t>15/06/2026</a:t>
+              <a:t>09/07/2026</a:t>
             </a:fld>
             <a:endParaRPr lang="en-GB"/>
           </a:p>
@@ -2696,7 +2696,7 @@
           <a:p>
             <a:fld id="{C6E6855C-4451-4D51-9C19-AA57B9F05DC3}" type="datetimeFigureOut">
               <a:rPr lang="en-GB" smtClean="0"/>
-              <a:t>15/06/2026</a:t>
+              <a:t>09/07/2026</a:t>
             </a:fld>
             <a:endParaRPr lang="en-GB"/>
           </a:p>
@@ -2939,7 +2939,7 @@
           <a:p>
             <a:fld id="{C6E6855C-4451-4D51-9C19-AA57B9F05DC3}" type="datetimeFigureOut">
               <a:rPr lang="en-GB" smtClean="0"/>
-              <a:t>15/06/2026</a:t>
+              <a:t>09/07/2026</a:t>
             </a:fld>
             <a:endParaRPr lang="en-GB"/>
           </a:p>
